--- a/apps/resources/bundled_files/6-klass-okshosh-muchular-sabak.pptx
+++ b/apps/resources/bundled_files/6-klass-okshosh-muchular-sabak.pptx
@@ -5196,7 +5196,7 @@
                 </a:solidFill>
                 <a:latin typeface="PT Sans"/>
               </a:rPr>
-              <a:t>6-класс · Математика</a:t>
+              <a:t/>
             </a:r>
           </a:p>
         </p:txBody>
@@ -5688,7 +5688,7 @@
                 </a:solidFill>
                 <a:latin typeface="PT Sans"/>
               </a:rPr>
-              <a:t>6-класс ›</a:t>
+              <a:t/>
             </a:r>
           </a:p>
           <a:p>
@@ -6605,7 +6605,7 @@
                 </a:solidFill>
                 <a:latin typeface="PT Sans"/>
               </a:rPr>
-              <a:t>6-класс ›</a:t>
+              <a:t/>
             </a:r>
           </a:p>
           <a:p>
@@ -9396,7 +9396,7 @@
                 </a:solidFill>
                 <a:latin typeface="PT Sans"/>
               </a:rPr>
-              <a:t>6-класс ›</a:t>
+              <a:t/>
             </a:r>
           </a:p>
           <a:p>
@@ -11838,7 +11838,7 @@
                 </a:solidFill>
                 <a:latin typeface="PT Sans"/>
               </a:rPr>
-              <a:t>6-класс ›</a:t>
+              <a:t/>
             </a:r>
           </a:p>
           <a:p>
@@ -13421,7 +13421,7 @@
                 </a:solidFill>
                 <a:latin typeface="PT Sans"/>
               </a:rPr>
-              <a:t>6-класс ›</a:t>
+              <a:t/>
             </a:r>
           </a:p>
           <a:p>
@@ -14211,7 +14211,7 @@
                 </a:solidFill>
                 <a:latin typeface="PT Sans"/>
               </a:rPr>
-              <a:t>6-класс ›</a:t>
+              <a:t/>
             </a:r>
           </a:p>
           <a:p>
@@ -15001,7 +15001,7 @@
                 </a:solidFill>
                 <a:latin typeface="PT Sans"/>
               </a:rPr>
-              <a:t>6-класс ›</a:t>
+              <a:t/>
             </a:r>
           </a:p>
           <a:p>
@@ -16667,7 +16667,7 @@
                 </a:solidFill>
                 <a:latin typeface="PT Sans"/>
               </a:rPr>
-              <a:t>6-класс ›</a:t>
+              <a:t/>
             </a:r>
           </a:p>
           <a:p>
@@ -17751,7 +17751,7 @@
                 </a:solidFill>
                 <a:latin typeface="PT Sans"/>
               </a:rPr>
-              <a:t>6-класс ›</a:t>
+              <a:t/>
             </a:r>
           </a:p>
           <a:p>
@@ -19281,7 +19281,7 @@
                 </a:solidFill>
                 <a:latin typeface="PT Sans"/>
               </a:rPr>
-              <a:t>6-класс ›</a:t>
+              <a:t/>
             </a:r>
           </a:p>
           <a:p>
@@ -21709,7 +21709,7 @@
                 </a:solidFill>
                 <a:latin typeface="PT Sans"/>
               </a:rPr>
-              <a:t>6-класс ›</a:t>
+              <a:t/>
             </a:r>
           </a:p>
           <a:p>
@@ -22986,7 +22986,7 @@
                 </a:solidFill>
                 <a:latin typeface="PT Sans"/>
               </a:rPr>
-              <a:t>6-класс ›</a:t>
+              <a:t/>
             </a:r>
           </a:p>
           <a:p>
@@ -24414,7 +24414,7 @@
                 </a:solidFill>
                 <a:latin typeface="PT Sans"/>
               </a:rPr>
-              <a:t>6-класс ›</a:t>
+              <a:t/>
             </a:r>
           </a:p>
           <a:p>
@@ -25870,7 +25870,7 @@
                 </a:solidFill>
                 <a:latin typeface="PT Sans"/>
               </a:rPr>
-              <a:t>6-класс ›</a:t>
+              <a:t/>
             </a:r>
           </a:p>
           <a:p>
@@ -27407,7 +27407,7 @@
                 </a:solidFill>
                 <a:latin typeface="PT Sans"/>
               </a:rPr>
-              <a:t>6-класс ›</a:t>
+              <a:t/>
             </a:r>
           </a:p>
           <a:p>
@@ -28207,7 +28207,7 @@
                 </a:solidFill>
                 <a:latin typeface="PT Sans"/>
               </a:rPr>
-              <a:t>6-класс ›</a:t>
+              <a:t/>
             </a:r>
           </a:p>
           <a:p>
@@ -29048,7 +29048,7 @@
                 </a:solidFill>
                 <a:latin typeface="PT Sans"/>
               </a:rPr>
-              <a:t>6-класс ›</a:t>
+              <a:t/>
             </a:r>
           </a:p>
           <a:p>
@@ -29997,7 +29997,7 @@
                 </a:solidFill>
                 <a:latin typeface="PT Sans"/>
               </a:rPr>
-              <a:t>6-класс ›</a:t>
+              <a:t/>
             </a:r>
           </a:p>
           <a:p>
@@ -31451,7 +31451,7 @@
                 </a:solidFill>
                 <a:latin typeface="PT Sans"/>
               </a:rPr>
-              <a:t>6-класс ›</a:t>
+              <a:t/>
             </a:r>
           </a:p>
           <a:p>
@@ -32197,7 +32197,7 @@
                 </a:solidFill>
                 <a:latin typeface="PT Sans"/>
               </a:rPr>
-              <a:t>6-класс ›</a:t>
+              <a:t/>
             </a:r>
           </a:p>
           <a:p>
@@ -33005,7 +33005,7 @@
                 </a:solidFill>
                 <a:latin typeface="PT Sans"/>
               </a:rPr>
-              <a:t>6-класс ›</a:t>
+              <a:t/>
             </a:r>
           </a:p>
           <a:p>
@@ -34196,7 +34196,7 @@
                 </a:solidFill>
                 <a:latin typeface="PT Sans"/>
               </a:rPr>
-              <a:t>6-класс ›</a:t>
+              <a:t/>
             </a:r>
           </a:p>
           <a:p>
@@ -35375,7 +35375,7 @@
                 </a:solidFill>
                 <a:latin typeface="PT Sans"/>
               </a:rPr>
-              <a:t>6-класс ›</a:t>
+              <a:t/>
             </a:r>
           </a:p>
           <a:p>
@@ -35556,7 +35556,7 @@
                 </a:solidFill>
                 <a:latin typeface="PT Sans"/>
               </a:rPr>
-              <a:t>4–5-класс</a:t>
+              <a:t/>
             </a:r>
           </a:p>
         </p:txBody>
@@ -35736,7 +35736,7 @@
                 </a:solidFill>
                 <a:latin typeface="PT Sans"/>
               </a:rPr>
-              <a:t>6-класс</a:t>
+              <a:t/>
             </a:r>
           </a:p>
         </p:txBody>
@@ -35916,7 +35916,7 @@
                 </a:solidFill>
                 <a:latin typeface="PT Sans"/>
               </a:rPr>
-              <a:t>6-класс</a:t>
+              <a:t/>
             </a:r>
           </a:p>
         </p:txBody>
@@ -36152,7 +36152,7 @@
                 </a:solidFill>
                 <a:latin typeface="PT Sans"/>
               </a:rPr>
-              <a:t>7-класс</a:t>
+              <a:t/>
             </a:r>
           </a:p>
         </p:txBody>
@@ -36572,7 +36572,7 @@
                 </a:solidFill>
                 <a:latin typeface="PT Sans"/>
               </a:rPr>
-              <a:t>6-класс ›</a:t>
+              <a:t/>
             </a:r>
           </a:p>
           <a:p>
@@ -37720,7 +37720,7 @@
                 </a:solidFill>
                 <a:latin typeface="PT Sans"/>
               </a:rPr>
-              <a:t>6-класс ›</a:t>
+              <a:t/>
             </a:r>
           </a:p>
           <a:p>

--- a/apps/resources/bundled_files/6-klass-okshosh-muchular-sabak.pptx
+++ b/apps/resources/bundled_files/6-klass-okshosh-muchular-sabak.pptx
@@ -667,7 +667,7 @@
           <a:lstStyle/>
           <a:p>
             <a:r>
-              <a:t>Окшош мүчөлөр (окшош кошулуучулар) = тамгалуу бөлүгү бирдей мүчөлөр. Коэффициент = тамганын алдындагы сан; a = 1a. Мүчөнүн белгиси андан мурунку белги: 8a − 3a + 2aда −3a жана +2a. Кашааны ачканда ичиндеги ар бир мүчө көбөйөт. Ката коддору: М1 (окшош эмес), М4 (кашаа), М5 (белги).</a:t>
+              <a:t>Окшош мүчөлөр (окшош кошулуучулар) = тамгалуу бөлүгү бирдей мүчөлөр. Коэффициент = тамганын алдындагы сан; a = 1a. Мүчөнүн белгиси андан мурунку белги: 8a − 3a + 2ада −3a жана +2a. Кашааны ачканда ичиндеги ар бир мүчө көбөйөт. Ката коддору: М1 (окшош эмес), М4 (кашаа), М5 (белги).</a:t>
             </a:r>
           </a:p>
         </p:txBody>
@@ -1582,7 +1582,7 @@
           <a:lstStyle/>
           <a:p>
             <a:r>
-              <a:t>Ой жүгүртүү маданияты (Wenxi Lee, 2.6).</a:t>
+              <a:t>Ой жүгүртүү маданияты (Wenxi Lee, 2,6).</a:t>
             </a:r>
           </a:p>
         </p:txBody>
